--- a/_site/gemeinsam/vorlagen/Mathematik_Wiederholung_Designvorlage.pptx
+++ b/_site/gemeinsam/vorlagen/Mathematik_Wiederholung_Designvorlage.pptx
@@ -460,46 +460,46 @@
 </file>
 
 <file path=ppt/notesSlides/notesSlide1.xml><?xml version="1.0" encoding="utf-8"?>
-<p:notes xmlns:a="http://schemas.openxmlformats.org/drawingml/2006/main" xmlns:r="http://schemas.openxmlformats.org/officeDocument/2006/relationships" xmlns:p="http://schemas.openxmlformats.org/presentationml/2006/main">
-  <p:cSld>
-    <p:spTree>
-      <p:nvGrpSpPr>
-        <p:cNvPr id="1" name=""/>
-        <p:cNvGrpSpPr/>
-        <p:nvPr/>
-      </p:nvGrpSpPr>
-      <p:grpSpPr>
+<ns0:notes xmlns:a="http://schemas.openxmlformats.org/drawingml/2006/main" xmlns:ns0="http://schemas.openxmlformats.org/presentationml/2006/main" xmlns:ns2="http://schemas.microsoft.com/office/powerpoint/2010/main">
+  <ns0:cSld>
+    <ns0:spTree>
+      <ns0:nvGrpSpPr>
+        <ns0:cNvPr id="1" name=""/>
+        <ns0:cNvGrpSpPr/>
+        <ns0:nvPr/>
+      </ns0:nvGrpSpPr>
+      <ns0:grpSpPr>
         <a:xfrm>
           <a:off x="0" y="0"/>
           <a:ext cx="0" cy="0"/>
           <a:chOff x="0" y="0"/>
           <a:chExt cx="0" cy="0"/>
         </a:xfrm>
-      </p:grpSpPr>
-      <p:sp>
-        <p:nvSpPr>
-          <p:cNvPr id="2" name="Slide Image Placeholder 1"/>
-          <p:cNvSpPr>
+      </ns0:grpSpPr>
+      <ns0:sp>
+        <ns0:nvSpPr>
+          <ns0:cNvPr id="2" name="Slide Image Placeholder 1"/>
+          <ns0:cNvSpPr>
             <a:spLocks noGrp="1" noRot="1" noChangeAspect="1"/>
-          </p:cNvSpPr>
-          <p:nvPr>
-            <p:ph type="sldImg"/>
-          </p:nvPr>
-        </p:nvSpPr>
-        <p:spPr/>
-      </p:sp>
-      <p:sp>
-        <p:nvSpPr>
-          <p:cNvPr id="3" name="Notes Placeholder 2"/>
-          <p:cNvSpPr>
+          </ns0:cNvSpPr>
+          <ns0:nvPr>
+            <ns0:ph type="sldImg"/>
+          </ns0:nvPr>
+        </ns0:nvSpPr>
+        <ns0:spPr/>
+      </ns0:sp>
+      <ns0:sp>
+        <ns0:nvSpPr>
+          <ns0:cNvPr id="3" name="Notes Placeholder 2"/>
+          <ns0:cNvSpPr>
             <a:spLocks noGrp="1"/>
-          </p:cNvSpPr>
-          <p:nvPr>
-            <p:ph type="body" idx="1"/>
-          </p:nvPr>
-        </p:nvSpPr>
-        <p:spPr/>
-        <p:txBody>
+          </ns0:cNvSpPr>
+          <ns0:nvPr>
+            <ns0:ph type="body" idx="1"/>
+          </ns0:nvPr>
+        </ns0:nvSpPr>
+        <ns0:spPr/>
+        <ns0:txBody>
           <a:bodyPr/>
           <a:lstStyle/>
           <a:p>
@@ -509,85 +509,85 @@
             </a:r>
             <a:endParaRPr lang="en-US" dirty="0"/>
           </a:p>
-        </p:txBody>
-      </p:sp>
-      <p:sp>
-        <p:nvSpPr>
-          <p:cNvPr id="4" name="Slide Number Placeholder 3"/>
-          <p:cNvSpPr>
+        </ns0:txBody>
+      </ns0:sp>
+      <ns0:sp>
+        <ns0:nvSpPr>
+          <ns0:cNvPr id="4" name="Slide Number Placeholder 3"/>
+          <ns0:cNvSpPr>
             <a:spLocks noGrp="1"/>
-          </p:cNvSpPr>
-          <p:nvPr>
-            <p:ph type="sldNum" sz="quarter" idx="10"/>
-          </p:nvPr>
-        </p:nvSpPr>
-        <p:spPr/>
-        <p:txBody>
+          </ns0:cNvSpPr>
+          <ns0:nvPr>
+            <ns0:ph type="sldNum" sz="quarter" idx="10"/>
+          </ns0:nvPr>
+        </ns0:nvSpPr>
+        <ns0:spPr/>
+        <ns0:txBody>
           <a:bodyPr/>
           <a:lstStyle/>
           <a:p>
             <a:fld id="{F7021451-1387-4CA6-816F-3879F97B5CBC}" type="slidenum">
               <a:rPr lang="en-US"/>
-              <a:t>1</a:t>
+              <a:t/>
             </a:fld>
             <a:endParaRPr lang="en-US"/>
           </a:p>
-        </p:txBody>
-      </p:sp>
-    </p:spTree>
-    <p:extLst>
-      <p:ext uri="{BB962C8B-B14F-4D97-AF65-F5344CB8AC3E}">
-        <p14:creationId xmlns:p14="http://schemas.microsoft.com/office/powerpoint/2010/main" val="1024086991"/>
-      </p:ext>
-    </p:extLst>
-  </p:cSld>
-  <p:clrMapOvr>
+        </ns0:txBody>
+      </ns0:sp>
+    </ns0:spTree>
+    <ns0:extLst>
+      <ns0:ext uri="{BB962C8B-B14F-4D97-AF65-F5344CB8AC3E}">
+        <ns2:creationId val="1024086991"/>
+      </ns0:ext>
+    </ns0:extLst>
+  </ns0:cSld>
+  <ns0:clrMapOvr>
     <a:masterClrMapping/>
-  </p:clrMapOvr>
-</p:notes>
+  </ns0:clrMapOvr>
+</ns0:notes>
 </file>
 
 <file path=ppt/notesSlides/notesSlide2.xml><?xml version="1.0" encoding="utf-8"?>
-<p:notes xmlns:a="http://schemas.openxmlformats.org/drawingml/2006/main" xmlns:r="http://schemas.openxmlformats.org/officeDocument/2006/relationships" xmlns:p="http://schemas.openxmlformats.org/presentationml/2006/main">
-  <p:cSld>
-    <p:spTree>
-      <p:nvGrpSpPr>
-        <p:cNvPr id="1" name=""/>
-        <p:cNvGrpSpPr/>
-        <p:nvPr/>
-      </p:nvGrpSpPr>
-      <p:grpSpPr>
+<ns0:notes xmlns:a="http://schemas.openxmlformats.org/drawingml/2006/main" xmlns:ns0="http://schemas.openxmlformats.org/presentationml/2006/main" xmlns:ns2="http://schemas.microsoft.com/office/powerpoint/2010/main">
+  <ns0:cSld>
+    <ns0:spTree>
+      <ns0:nvGrpSpPr>
+        <ns0:cNvPr id="1" name=""/>
+        <ns0:cNvGrpSpPr/>
+        <ns0:nvPr/>
+      </ns0:nvGrpSpPr>
+      <ns0:grpSpPr>
         <a:xfrm>
           <a:off x="0" y="0"/>
           <a:ext cx="0" cy="0"/>
           <a:chOff x="0" y="0"/>
           <a:chExt cx="0" cy="0"/>
         </a:xfrm>
-      </p:grpSpPr>
-      <p:sp>
-        <p:nvSpPr>
-          <p:cNvPr id="2" name="Slide Image Placeholder 1"/>
-          <p:cNvSpPr>
+      </ns0:grpSpPr>
+      <ns0:sp>
+        <ns0:nvSpPr>
+          <ns0:cNvPr id="2" name="Slide Image Placeholder 1"/>
+          <ns0:cNvSpPr>
             <a:spLocks noGrp="1" noRot="1" noChangeAspect="1"/>
-          </p:cNvSpPr>
-          <p:nvPr>
-            <p:ph type="sldImg"/>
-          </p:nvPr>
-        </p:nvSpPr>
-        <p:spPr/>
-      </p:sp>
-      <p:sp>
-        <p:nvSpPr>
-          <p:cNvPr id="3" name="Notes Placeholder 2"/>
-          <p:cNvSpPr>
+          </ns0:cNvSpPr>
+          <ns0:nvPr>
+            <ns0:ph type="sldImg"/>
+          </ns0:nvPr>
+        </ns0:nvSpPr>
+        <ns0:spPr/>
+      </ns0:sp>
+      <ns0:sp>
+        <ns0:nvSpPr>
+          <ns0:cNvPr id="3" name="Notes Placeholder 2"/>
+          <ns0:cNvSpPr>
             <a:spLocks noGrp="1"/>
-          </p:cNvSpPr>
-          <p:nvPr>
-            <p:ph type="body" idx="1"/>
-          </p:nvPr>
-        </p:nvSpPr>
-        <p:spPr/>
-        <p:txBody>
+          </ns0:cNvSpPr>
+          <ns0:nvPr>
+            <ns0:ph type="body" idx="1"/>
+          </ns0:nvPr>
+        </ns0:nvSpPr>
+        <ns0:spPr/>
+        <ns0:txBody>
           <a:bodyPr/>
           <a:lstStyle/>
           <a:p>
@@ -597,85 +597,85 @@
             </a:r>
             <a:endParaRPr lang="en-US" dirty="0"/>
           </a:p>
-        </p:txBody>
-      </p:sp>
-      <p:sp>
-        <p:nvSpPr>
-          <p:cNvPr id="4" name="Slide Number Placeholder 3"/>
-          <p:cNvSpPr>
+        </ns0:txBody>
+      </ns0:sp>
+      <ns0:sp>
+        <ns0:nvSpPr>
+          <ns0:cNvPr id="4" name="Slide Number Placeholder 3"/>
+          <ns0:cNvSpPr>
             <a:spLocks noGrp="1"/>
-          </p:cNvSpPr>
-          <p:nvPr>
-            <p:ph type="sldNum" sz="quarter" idx="10"/>
-          </p:nvPr>
-        </p:nvSpPr>
-        <p:spPr/>
-        <p:txBody>
+          </ns0:cNvSpPr>
+          <ns0:nvPr>
+            <ns0:ph type="sldNum" sz="quarter" idx="10"/>
+          </ns0:nvPr>
+        </ns0:nvSpPr>
+        <ns0:spPr/>
+        <ns0:txBody>
           <a:bodyPr/>
           <a:lstStyle/>
           <a:p>
             <a:fld id="{F7021451-1387-4CA6-816F-3879F97B5CBC}" type="slidenum">
               <a:rPr lang="en-US"/>
-              <a:t>2</a:t>
+              <a:t/>
             </a:fld>
             <a:endParaRPr lang="en-US"/>
           </a:p>
-        </p:txBody>
-      </p:sp>
-    </p:spTree>
-    <p:extLst>
-      <p:ext uri="{BB962C8B-B14F-4D97-AF65-F5344CB8AC3E}">
-        <p14:creationId xmlns:p14="http://schemas.microsoft.com/office/powerpoint/2010/main" val="1024086991"/>
-      </p:ext>
-    </p:extLst>
-  </p:cSld>
-  <p:clrMapOvr>
+        </ns0:txBody>
+      </ns0:sp>
+    </ns0:spTree>
+    <ns0:extLst>
+      <ns0:ext uri="{BB962C8B-B14F-4D97-AF65-F5344CB8AC3E}">
+        <ns2:creationId val="1024086991"/>
+      </ns0:ext>
+    </ns0:extLst>
+  </ns0:cSld>
+  <ns0:clrMapOvr>
     <a:masterClrMapping/>
-  </p:clrMapOvr>
-</p:notes>
+  </ns0:clrMapOvr>
+</ns0:notes>
 </file>
 
 <file path=ppt/notesSlides/notesSlide3.xml><?xml version="1.0" encoding="utf-8"?>
-<p:notes xmlns:a="http://schemas.openxmlformats.org/drawingml/2006/main" xmlns:r="http://schemas.openxmlformats.org/officeDocument/2006/relationships" xmlns:p="http://schemas.openxmlformats.org/presentationml/2006/main">
-  <p:cSld>
-    <p:spTree>
-      <p:nvGrpSpPr>
-        <p:cNvPr id="1" name=""/>
-        <p:cNvGrpSpPr/>
-        <p:nvPr/>
-      </p:nvGrpSpPr>
-      <p:grpSpPr>
+<ns0:notes xmlns:a="http://schemas.openxmlformats.org/drawingml/2006/main" xmlns:ns0="http://schemas.openxmlformats.org/presentationml/2006/main" xmlns:ns2="http://schemas.microsoft.com/office/powerpoint/2010/main">
+  <ns0:cSld>
+    <ns0:spTree>
+      <ns0:nvGrpSpPr>
+        <ns0:cNvPr id="1" name=""/>
+        <ns0:cNvGrpSpPr/>
+        <ns0:nvPr/>
+      </ns0:nvGrpSpPr>
+      <ns0:grpSpPr>
         <a:xfrm>
           <a:off x="0" y="0"/>
           <a:ext cx="0" cy="0"/>
           <a:chOff x="0" y="0"/>
           <a:chExt cx="0" cy="0"/>
         </a:xfrm>
-      </p:grpSpPr>
-      <p:sp>
-        <p:nvSpPr>
-          <p:cNvPr id="2" name="Slide Image Placeholder 1"/>
-          <p:cNvSpPr>
+      </ns0:grpSpPr>
+      <ns0:sp>
+        <ns0:nvSpPr>
+          <ns0:cNvPr id="2" name="Slide Image Placeholder 1"/>
+          <ns0:cNvSpPr>
             <a:spLocks noGrp="1" noRot="1" noChangeAspect="1"/>
-          </p:cNvSpPr>
-          <p:nvPr>
-            <p:ph type="sldImg"/>
-          </p:nvPr>
-        </p:nvSpPr>
-        <p:spPr/>
-      </p:sp>
-      <p:sp>
-        <p:nvSpPr>
-          <p:cNvPr id="3" name="Notes Placeholder 2"/>
-          <p:cNvSpPr>
+          </ns0:cNvSpPr>
+          <ns0:nvPr>
+            <ns0:ph type="sldImg"/>
+          </ns0:nvPr>
+        </ns0:nvSpPr>
+        <ns0:spPr/>
+      </ns0:sp>
+      <ns0:sp>
+        <ns0:nvSpPr>
+          <ns0:cNvPr id="3" name="Notes Placeholder 2"/>
+          <ns0:cNvSpPr>
             <a:spLocks noGrp="1"/>
-          </p:cNvSpPr>
-          <p:nvPr>
-            <p:ph type="body" idx="1"/>
-          </p:nvPr>
-        </p:nvSpPr>
-        <p:spPr/>
-        <p:txBody>
+          </ns0:cNvSpPr>
+          <ns0:nvPr>
+            <ns0:ph type="body" idx="1"/>
+          </ns0:nvPr>
+        </ns0:nvSpPr>
+        <ns0:spPr/>
+        <ns0:txBody>
           <a:bodyPr/>
           <a:lstStyle/>
           <a:p>
@@ -685,85 +685,85 @@
             </a:r>
             <a:endParaRPr lang="en-US" dirty="0"/>
           </a:p>
-        </p:txBody>
-      </p:sp>
-      <p:sp>
-        <p:nvSpPr>
-          <p:cNvPr id="4" name="Slide Number Placeholder 3"/>
-          <p:cNvSpPr>
+        </ns0:txBody>
+      </ns0:sp>
+      <ns0:sp>
+        <ns0:nvSpPr>
+          <ns0:cNvPr id="4" name="Slide Number Placeholder 3"/>
+          <ns0:cNvSpPr>
             <a:spLocks noGrp="1"/>
-          </p:cNvSpPr>
-          <p:nvPr>
-            <p:ph type="sldNum" sz="quarter" idx="10"/>
-          </p:nvPr>
-        </p:nvSpPr>
-        <p:spPr/>
-        <p:txBody>
+          </ns0:cNvSpPr>
+          <ns0:nvPr>
+            <ns0:ph type="sldNum" sz="quarter" idx="10"/>
+          </ns0:nvPr>
+        </ns0:nvSpPr>
+        <ns0:spPr/>
+        <ns0:txBody>
           <a:bodyPr/>
           <a:lstStyle/>
           <a:p>
             <a:fld id="{F7021451-1387-4CA6-816F-3879F97B5CBC}" type="slidenum">
               <a:rPr lang="en-US"/>
-              <a:t>3</a:t>
+              <a:t/>
             </a:fld>
             <a:endParaRPr lang="en-US"/>
           </a:p>
-        </p:txBody>
-      </p:sp>
-    </p:spTree>
-    <p:extLst>
-      <p:ext uri="{BB962C8B-B14F-4D97-AF65-F5344CB8AC3E}">
-        <p14:creationId xmlns:p14="http://schemas.microsoft.com/office/powerpoint/2010/main" val="1024086991"/>
-      </p:ext>
-    </p:extLst>
-  </p:cSld>
-  <p:clrMapOvr>
+        </ns0:txBody>
+      </ns0:sp>
+    </ns0:spTree>
+    <ns0:extLst>
+      <ns0:ext uri="{BB962C8B-B14F-4D97-AF65-F5344CB8AC3E}">
+        <ns2:creationId val="1024086991"/>
+      </ns0:ext>
+    </ns0:extLst>
+  </ns0:cSld>
+  <ns0:clrMapOvr>
     <a:masterClrMapping/>
-  </p:clrMapOvr>
-</p:notes>
+  </ns0:clrMapOvr>
+</ns0:notes>
 </file>
 
 <file path=ppt/notesSlides/notesSlide4.xml><?xml version="1.0" encoding="utf-8"?>
-<p:notes xmlns:a="http://schemas.openxmlformats.org/drawingml/2006/main" xmlns:r="http://schemas.openxmlformats.org/officeDocument/2006/relationships" xmlns:p="http://schemas.openxmlformats.org/presentationml/2006/main">
-  <p:cSld>
-    <p:spTree>
-      <p:nvGrpSpPr>
-        <p:cNvPr id="1" name=""/>
-        <p:cNvGrpSpPr/>
-        <p:nvPr/>
-      </p:nvGrpSpPr>
-      <p:grpSpPr>
+<ns0:notes xmlns:a="http://schemas.openxmlformats.org/drawingml/2006/main" xmlns:ns0="http://schemas.openxmlformats.org/presentationml/2006/main" xmlns:ns2="http://schemas.microsoft.com/office/powerpoint/2010/main">
+  <ns0:cSld>
+    <ns0:spTree>
+      <ns0:nvGrpSpPr>
+        <ns0:cNvPr id="1" name=""/>
+        <ns0:cNvGrpSpPr/>
+        <ns0:nvPr/>
+      </ns0:nvGrpSpPr>
+      <ns0:grpSpPr>
         <a:xfrm>
           <a:off x="0" y="0"/>
           <a:ext cx="0" cy="0"/>
           <a:chOff x="0" y="0"/>
           <a:chExt cx="0" cy="0"/>
         </a:xfrm>
-      </p:grpSpPr>
-      <p:sp>
-        <p:nvSpPr>
-          <p:cNvPr id="2" name="Slide Image Placeholder 1"/>
-          <p:cNvSpPr>
+      </ns0:grpSpPr>
+      <ns0:sp>
+        <ns0:nvSpPr>
+          <ns0:cNvPr id="2" name="Slide Image Placeholder 1"/>
+          <ns0:cNvSpPr>
             <a:spLocks noGrp="1" noRot="1" noChangeAspect="1"/>
-          </p:cNvSpPr>
-          <p:nvPr>
-            <p:ph type="sldImg"/>
-          </p:nvPr>
-        </p:nvSpPr>
-        <p:spPr/>
-      </p:sp>
-      <p:sp>
-        <p:nvSpPr>
-          <p:cNvPr id="3" name="Notes Placeholder 2"/>
-          <p:cNvSpPr>
+          </ns0:cNvSpPr>
+          <ns0:nvPr>
+            <ns0:ph type="sldImg"/>
+          </ns0:nvPr>
+        </ns0:nvSpPr>
+        <ns0:spPr/>
+      </ns0:sp>
+      <ns0:sp>
+        <ns0:nvSpPr>
+          <ns0:cNvPr id="3" name="Notes Placeholder 2"/>
+          <ns0:cNvSpPr>
             <a:spLocks noGrp="1"/>
-          </p:cNvSpPr>
-          <p:nvPr>
-            <p:ph type="body" idx="1"/>
-          </p:nvPr>
-        </p:nvSpPr>
-        <p:spPr/>
-        <p:txBody>
+          </ns0:cNvSpPr>
+          <ns0:nvPr>
+            <ns0:ph type="body" idx="1"/>
+          </ns0:nvPr>
+        </ns0:nvSpPr>
+        <ns0:spPr/>
+        <ns0:txBody>
           <a:bodyPr/>
           <a:lstStyle/>
           <a:p>
@@ -773,42 +773,42 @@
             </a:r>
             <a:endParaRPr lang="en-US" dirty="0"/>
           </a:p>
-        </p:txBody>
-      </p:sp>
-      <p:sp>
-        <p:nvSpPr>
-          <p:cNvPr id="4" name="Slide Number Placeholder 3"/>
-          <p:cNvSpPr>
+        </ns0:txBody>
+      </ns0:sp>
+      <ns0:sp>
+        <ns0:nvSpPr>
+          <ns0:cNvPr id="4" name="Slide Number Placeholder 3"/>
+          <ns0:cNvSpPr>
             <a:spLocks noGrp="1"/>
-          </p:cNvSpPr>
-          <p:nvPr>
-            <p:ph type="sldNum" sz="quarter" idx="10"/>
-          </p:nvPr>
-        </p:nvSpPr>
-        <p:spPr/>
-        <p:txBody>
+          </ns0:cNvSpPr>
+          <ns0:nvPr>
+            <ns0:ph type="sldNum" sz="quarter" idx="10"/>
+          </ns0:nvPr>
+        </ns0:nvSpPr>
+        <ns0:spPr/>
+        <ns0:txBody>
           <a:bodyPr/>
           <a:lstStyle/>
           <a:p>
             <a:fld id="{F7021451-1387-4CA6-816F-3879F97B5CBC}" type="slidenum">
               <a:rPr lang="en-US"/>
-              <a:t>4</a:t>
+              <a:t/>
             </a:fld>
             <a:endParaRPr lang="en-US"/>
           </a:p>
-        </p:txBody>
-      </p:sp>
-    </p:spTree>
-    <p:extLst>
-      <p:ext uri="{BB962C8B-B14F-4D97-AF65-F5344CB8AC3E}">
-        <p14:creationId xmlns:p14="http://schemas.microsoft.com/office/powerpoint/2010/main" val="1024086991"/>
-      </p:ext>
-    </p:extLst>
-  </p:cSld>
-  <p:clrMapOvr>
+        </ns0:txBody>
+      </ns0:sp>
+    </ns0:spTree>
+    <ns0:extLst>
+      <ns0:ext uri="{BB962C8B-B14F-4D97-AF65-F5344CB8AC3E}">
+        <ns2:creationId val="1024086991"/>
+      </ns0:ext>
+    </ns0:extLst>
+  </ns0:cSld>
+  <ns0:clrMapOvr>
     <a:masterClrMapping/>
-  </p:clrMapOvr>
-</p:notes>
+  </ns0:clrMapOvr>
+</ns0:notes>
 </file>
 
 <file path=ppt/slideLayouts/slideLayout1.xml><?xml version="1.0" encoding="utf-8"?>
@@ -1815,29 +1815,29 @@
 </file>
 
 <file path=ppt/slides/slide1.xml><?xml version="1.0" encoding="utf-8"?>
-<p:sld xmlns:a="http://schemas.openxmlformats.org/drawingml/2006/main" xmlns:r="http://schemas.openxmlformats.org/officeDocument/2006/relationships" xmlns:p="http://schemas.openxmlformats.org/presentationml/2006/main">
-  <p:cSld name="Slide 1">
-    <p:spTree>
-      <p:nvGrpSpPr>
-        <p:cNvPr id="1" name=""/>
-        <p:cNvGrpSpPr/>
-        <p:nvPr/>
-      </p:nvGrpSpPr>
-      <p:grpSpPr>
+<ns0:sld xmlns:a="http://schemas.openxmlformats.org/drawingml/2006/main" xmlns:ns0="http://schemas.openxmlformats.org/presentationml/2006/main" xmlns:ns2="http://schemas.microsoft.com/office/mac/drawingml/2011/main">
+  <ns0:cSld name="Slide 1">
+    <ns0:spTree>
+      <ns0:nvGrpSpPr>
+        <ns0:cNvPr id="1" name=""/>
+        <ns0:cNvGrpSpPr/>
+        <ns0:nvPr/>
+      </ns0:nvGrpSpPr>
+      <ns0:grpSpPr>
         <a:xfrm>
           <a:off x="0" y="0"/>
           <a:ext cx="0" cy="0"/>
           <a:chOff x="0" y="0"/>
           <a:chExt cx="0" cy="0"/>
         </a:xfrm>
-      </p:grpSpPr>
-      <p:sp>
-        <p:nvSpPr>
-          <p:cNvPr id="2" name="Shape 0"/>
-          <p:cNvSpPr/>
-          <p:nvPr/>
-        </p:nvSpPr>
-        <p:spPr>
+      </ns0:grpSpPr>
+      <ns0:sp>
+        <ns0:nvSpPr>
+          <ns0:cNvPr id="2" name="Shape 0"/>
+          <ns0:cNvSpPr/>
+          <ns0:nvPr/>
+        </ns0:nvSpPr>
+        <ns0:spPr>
           <a:xfrm>
             <a:off x="685800" y="1261872"/>
             <a:ext cx="1920240" cy="329184"/>
@@ -1858,15 +1858,15 @@
             </a:solidFill>
             <a:prstDash val="solid"/>
           </a:ln>
-        </p:spPr>
-      </p:sp>
-      <p:sp>
-        <p:nvSpPr>
-          <p:cNvPr id="3" name="Text 1"/>
-          <p:cNvSpPr/>
-          <p:nvPr/>
-        </p:nvSpPr>
-        <p:spPr>
+        </ns0:spPr>
+      </ns0:sp>
+      <ns0:sp>
+        <ns0:nvSpPr>
+          <ns0:cNvPr id="3" name="Text 1"/>
+          <ns0:cNvSpPr/>
+          <ns0:nvPr/>
+        </ns0:nvSpPr>
+        <ns0:spPr>
           <a:xfrm>
             <a:off x="758952" y="1289304"/>
             <a:ext cx="1773936" cy="256032"/>
@@ -1876,8 +1876,8 @@
           </a:prstGeom>
           <a:noFill/>
           <a:ln/>
-        </p:spPr>
-        <p:txBody>
+        </ns0:spPr>
+        <ns0:txBody>
           <a:bodyPr wrap="square" lIns="508" tIns="508" rIns="508" bIns="508" rtlCol="0" anchor="ctr">
             <a:normAutofit/>
           </a:bodyPr>
@@ -1899,15 +1899,15 @@
             </a:r>
             <a:endParaRPr lang="en-US" sz="1050" dirty="0"/>
           </a:p>
-        </p:txBody>
-      </p:sp>
-      <p:sp>
-        <p:nvSpPr>
-          <p:cNvPr id="4" name="Text 2"/>
-          <p:cNvSpPr/>
-          <p:nvPr/>
-        </p:nvSpPr>
-        <p:spPr>
+        </ns0:txBody>
+      </ns0:sp>
+      <ns0:sp>
+        <ns0:nvSpPr>
+          <ns0:cNvPr id="4" name="Text 2"/>
+          <ns0:cNvSpPr/>
+          <ns0:nvPr/>
+        </ns0:nvSpPr>
+        <ns0:spPr>
           <a:xfrm>
             <a:off x="685800" y="1828800"/>
             <a:ext cx="10332720" cy="658368"/>
@@ -1917,8 +1917,8 @@
           </a:prstGeom>
           <a:noFill/>
           <a:ln/>
-        </p:spPr>
-        <p:txBody>
+        </ns0:spPr>
+        <ns0:txBody>
           <a:bodyPr wrap="square" lIns="508" tIns="508" rIns="508" bIns="508" rtlCol="0" anchor="ctr">
             <a:normAutofit/>
           </a:bodyPr>
@@ -1940,15 +1940,15 @@
             </a:r>
             <a:endParaRPr lang="en-US" sz="3300" dirty="0"/>
           </a:p>
-        </p:txBody>
-      </p:sp>
-      <p:sp>
-        <p:nvSpPr>
-          <p:cNvPr id="5" name="Text 3"/>
-          <p:cNvSpPr/>
-          <p:nvPr/>
-        </p:nvSpPr>
-        <p:spPr>
+        </ns0:txBody>
+      </ns0:sp>
+      <ns0:sp>
+        <ns0:nvSpPr>
+          <ns0:cNvPr id="5" name="Text 3"/>
+          <ns0:cNvSpPr/>
+          <ns0:nvPr/>
+        </ns0:nvSpPr>
+        <ns0:spPr>
           <a:xfrm>
             <a:off x="713232" y="2633472"/>
             <a:ext cx="9509760" cy="347472"/>
@@ -1958,8 +1958,8 @@
           </a:prstGeom>
           <a:noFill/>
           <a:ln/>
-        </p:spPr>
-        <p:txBody>
+        </ns0:spPr>
+        <ns0:txBody>
           <a:bodyPr wrap="square" lIns="508" tIns="508" rIns="508" bIns="508" rtlCol="0" anchor="ctr">
             <a:normAutofit/>
           </a:bodyPr>
@@ -1977,19 +1977,19 @@
                 <a:ea typeface="Arial" pitchFamily="34" charset="-122"/>
                 <a:cs typeface="Arial" pitchFamily="34" charset="-120"/>
               </a:rPr>
-              <a:t>Designvorlage · 16:9 · wiederverwendbare Masterlayouts</a:t>
+              <a:t>Designvorlage</a:t>
             </a:r>
             <a:endParaRPr lang="en-US" sz="1600" dirty="0"/>
           </a:p>
-        </p:txBody>
-      </p:sp>
-      <p:sp>
-        <p:nvSpPr>
-          <p:cNvPr id="6" name="Text 4"/>
-          <p:cNvSpPr/>
-          <p:nvPr/>
-        </p:nvSpPr>
-        <p:spPr>
+        </ns0:txBody>
+      </ns0:sp>
+      <ns0:sp>
+        <ns0:nvSpPr>
+          <ns0:cNvPr id="6" name="Text 4"/>
+          <ns0:cNvSpPr/>
+          <ns0:nvPr/>
+        </ns0:nvSpPr>
+        <ns0:spPr>
           <a:xfrm>
             <a:off x="777240" y="3291840"/>
             <a:ext cx="5669280" cy="1965960"/>
@@ -1999,8 +1999,8 @@
           </a:prstGeom>
           <a:noFill/>
           <a:ln/>
-        </p:spPr>
-        <p:txBody>
+        </ns0:spPr>
+        <ns0:txBody>
           <a:bodyPr wrap="square" lIns="508" tIns="508" rIns="508" bIns="508" rtlCol="0" anchor="t">
             <a:normAutofit/>
           </a:bodyPr>
@@ -2090,19 +2090,19 @@
             </a:r>
             <a:endParaRPr lang="en-US" sz="1700" dirty="0"/>
           </a:p>
-        </p:txBody>
-      </p:sp>
-      <p:sp>
-        <p:nvSpPr>
-          <p:cNvPr id="25" name="Slide Number Placeholder 0"/>
-          <p:cNvSpPr>
+        </ns0:txBody>
+      </ns0:sp>
+      <ns0:sp>
+        <ns0:nvSpPr>
+          <ns0:cNvPr id="25" name="Slide Number Placeholder 0"/>
+          <ns0:cNvSpPr>
             <a:spLocks noGrp="1"/>
-          </p:cNvSpPr>
-          <p:nvPr>
-            <p:ph type="sldNum" sz="quarter" idx="4294967295"/>
-          </p:nvPr>
-        </p:nvSpPr>
-        <p:spPr>
+          </ns0:cNvSpPr>
+          <ns0:nvPr>
+            <ns0:ph type="sldNum" sz="quarter" idx="4294967295"/>
+          </ns0:nvPr>
+        </ns0:nvSpPr>
+        <ns0:spPr>
           <a:xfrm>
             <a:off x="11658600" y="6446520"/>
             <a:ext cx="274320" cy="182880"/>
@@ -2112,11 +2112,11 @@
           </a:prstGeom>
           <a:extLst>
             <a:ext uri="{C572A759-6A51-4108-AA02-DFA0A04FC94B}">
-              <ma14:wrappingTextBoxFlag xmlns:ma14="http://schemas.microsoft.com/office/mac/drawingml/2011/main" val="0"/>
+              <ns2:wrappingTextBoxFlag val="0"/>
             </a:ext>
           </a:extLst>
-        </p:spPr>
-        <p:txBody>
+        </ns0:spPr>
+        <ns0:txBody>
           <a:bodyPr/>
           <a:lstStyle>
             <a:lvl1pPr>
@@ -2138,40 +2138,40 @@
             </a:fld>
             <a:endParaRPr lang="en-US"/>
           </a:p>
-        </p:txBody>
-      </p:sp>
-    </p:spTree>
-  </p:cSld>
-  <p:clrMapOvr>
+        </ns0:txBody>
+      </ns0:sp>
+    </ns0:spTree>
+  </ns0:cSld>
+  <ns0:clrMapOvr>
     <a:masterClrMapping/>
-  </p:clrMapOvr>
-</p:sld>
+  </ns0:clrMapOvr>
+</ns0:sld>
 </file>
 
 <file path=ppt/slides/slide2.xml><?xml version="1.0" encoding="utf-8"?>
-<p:sld xmlns:a="http://schemas.openxmlformats.org/drawingml/2006/main" xmlns:r="http://schemas.openxmlformats.org/officeDocument/2006/relationships" xmlns:p="http://schemas.openxmlformats.org/presentationml/2006/main">
-  <p:cSld name="Slide 2">
-    <p:spTree>
-      <p:nvGrpSpPr>
-        <p:cNvPr id="1" name=""/>
-        <p:cNvGrpSpPr/>
-        <p:nvPr/>
-      </p:nvGrpSpPr>
-      <p:grpSpPr>
+<ns0:sld xmlns:a="http://schemas.openxmlformats.org/drawingml/2006/main" xmlns:ns0="http://schemas.openxmlformats.org/presentationml/2006/main" xmlns:ns2="http://schemas.microsoft.com/office/mac/drawingml/2011/main">
+  <ns0:cSld name="Slide 2">
+    <ns0:spTree>
+      <ns0:nvGrpSpPr>
+        <ns0:cNvPr id="1" name=""/>
+        <ns0:cNvGrpSpPr/>
+        <ns0:nvPr/>
+      </ns0:nvGrpSpPr>
+      <ns0:grpSpPr>
         <a:xfrm>
           <a:off x="0" y="0"/>
           <a:ext cx="0" cy="0"/>
           <a:chOff x="0" y="0"/>
           <a:chExt cx="0" cy="0"/>
         </a:xfrm>
-      </p:grpSpPr>
-      <p:sp>
-        <p:nvSpPr>
-          <p:cNvPr id="2" name="Text 0"/>
-          <p:cNvSpPr/>
-          <p:nvPr/>
-        </p:nvSpPr>
-        <p:spPr>
+      </ns0:grpSpPr>
+      <ns0:sp>
+        <ns0:nvSpPr>
+          <ns0:cNvPr id="2" name="Text 0"/>
+          <ns0:cNvSpPr/>
+          <ns0:nvPr/>
+        </ns0:nvSpPr>
+        <ns0:spPr>
           <a:xfrm>
             <a:off x="658368" y="658368"/>
             <a:ext cx="9784080" cy="475488"/>
@@ -2181,8 +2181,8 @@
           </a:prstGeom>
           <a:noFill/>
           <a:ln/>
-        </p:spPr>
-        <p:txBody>
+        </ns0:spPr>
+        <ns0:txBody>
           <a:bodyPr wrap="square" lIns="508" tIns="508" rIns="508" bIns="508" rtlCol="0" anchor="ctr">
             <a:normAutofit/>
           </a:bodyPr>
@@ -2204,15 +2204,15 @@
             </a:r>
             <a:endParaRPr lang="en-US" sz="2600" dirty="0"/>
           </a:p>
-        </p:txBody>
-      </p:sp>
-      <p:sp>
-        <p:nvSpPr>
-          <p:cNvPr id="3" name="Shape 1"/>
-          <p:cNvSpPr/>
-          <p:nvPr/>
-        </p:nvSpPr>
-        <p:spPr>
+        </ns0:txBody>
+      </ns0:sp>
+      <ns0:sp>
+        <ns0:nvSpPr>
+          <ns0:cNvPr id="3" name="Shape 1"/>
+          <ns0:cNvSpPr/>
+          <ns0:nvPr/>
+        </ns0:nvSpPr>
+        <ns0:spPr>
           <a:xfrm>
             <a:off x="10744200" y="694944"/>
             <a:ext cx="685800" cy="109728"/>
@@ -2229,15 +2229,15 @@
             </a:solidFill>
             <a:prstDash val="solid"/>
           </a:ln>
-        </p:spPr>
-      </p:sp>
-      <p:sp>
-        <p:nvSpPr>
-          <p:cNvPr id="4" name="Text 2"/>
-          <p:cNvSpPr/>
-          <p:nvPr/>
-        </p:nvSpPr>
-        <p:spPr>
+        </ns0:spPr>
+      </ns0:sp>
+      <ns0:sp>
+        <ns0:nvSpPr>
+          <ns0:cNvPr id="4" name="Text 2"/>
+          <ns0:cNvSpPr/>
+          <ns0:nvPr/>
+        </ns0:nvSpPr>
+        <ns0:spPr>
           <a:xfrm>
             <a:off x="676656" y="1152144"/>
             <a:ext cx="7772400" cy="256032"/>
@@ -2247,8 +2247,8 @@
           </a:prstGeom>
           <a:noFill/>
           <a:ln/>
-        </p:spPr>
-        <p:txBody>
+        </ns0:spPr>
+        <ns0:txBody>
           <a:bodyPr wrap="square" lIns="508" tIns="508" rIns="508" bIns="508" rtlCol="0" anchor="ctr">
             <a:normAutofit/>
           </a:bodyPr>
@@ -2270,15 +2270,15 @@
             </a:r>
             <a:endParaRPr lang="en-US" sz="1150" dirty="0"/>
           </a:p>
-        </p:txBody>
-      </p:sp>
-      <p:sp>
-        <p:nvSpPr>
-          <p:cNvPr id="5" name="Shape 3"/>
-          <p:cNvSpPr/>
-          <p:nvPr/>
-        </p:nvSpPr>
-        <p:spPr>
+        </ns0:txBody>
+      </ns0:sp>
+      <ns0:sp>
+        <ns0:nvSpPr>
+          <ns0:cNvPr id="5" name="Shape 3"/>
+          <ns0:cNvSpPr/>
+          <ns0:nvPr/>
+        </ns0:nvSpPr>
+        <ns0:spPr>
           <a:xfrm>
             <a:off x="731520" y="1600200"/>
             <a:ext cx="5257800" cy="1828800"/>
@@ -2304,15 +2304,15 @@
               </a:srgbClr>
             </a:outerShdw>
           </a:effectLst>
-        </p:spPr>
-      </p:sp>
-      <p:sp>
-        <p:nvSpPr>
-          <p:cNvPr id="6" name="Shape 4"/>
-          <p:cNvSpPr/>
-          <p:nvPr/>
-        </p:nvSpPr>
-        <p:spPr>
+        </ns0:spPr>
+      </ns0:sp>
+      <ns0:sp>
+        <ns0:nvSpPr>
+          <ns0:cNvPr id="6" name="Shape 4"/>
+          <ns0:cNvSpPr/>
+          <ns0:nvPr/>
+        </ns0:nvSpPr>
+        <ns0:spPr>
           <a:xfrm>
             <a:off x="731520" y="1600200"/>
             <a:ext cx="73152" cy="1828800"/>
@@ -2329,15 +2329,15 @@
             </a:solidFill>
             <a:prstDash val="solid"/>
           </a:ln>
-        </p:spPr>
-      </p:sp>
-      <p:sp>
-        <p:nvSpPr>
-          <p:cNvPr id="7" name="Text 5"/>
-          <p:cNvSpPr/>
-          <p:nvPr/>
-        </p:nvSpPr>
-        <p:spPr>
+        </ns0:spPr>
+      </ns0:sp>
+      <ns0:sp>
+        <ns0:nvSpPr>
+          <ns0:cNvPr id="7" name="Text 5"/>
+          <ns0:cNvSpPr/>
+          <ns0:nvPr/>
+        </ns0:nvSpPr>
+        <ns0:spPr>
           <a:xfrm>
             <a:off x="914400" y="1737360"/>
             <a:ext cx="4937760" cy="256032"/>
@@ -2347,8 +2347,8 @@
           </a:prstGeom>
           <a:noFill/>
           <a:ln/>
-        </p:spPr>
-        <p:txBody>
+        </ns0:spPr>
+        <ns0:txBody>
           <a:bodyPr wrap="square" lIns="508" tIns="508" rIns="508" bIns="508" rtlCol="0" anchor="ctr">
             <a:normAutofit/>
           </a:bodyPr>
@@ -2370,15 +2370,15 @@
             </a:r>
             <a:endParaRPr lang="en-US" sz="1150" dirty="0"/>
           </a:p>
-        </p:txBody>
-      </p:sp>
-      <p:sp>
-        <p:nvSpPr>
-          <p:cNvPr id="8" name="Text 6"/>
-          <p:cNvSpPr/>
-          <p:nvPr/>
-        </p:nvSpPr>
-        <p:spPr>
+        </ns0:txBody>
+      </ns0:sp>
+      <ns0:sp>
+        <ns0:nvSpPr>
+          <ns0:cNvPr id="8" name="Text 6"/>
+          <ns0:cNvSpPr/>
+          <ns0:nvPr/>
+        </ns0:nvSpPr>
+        <ns0:spPr>
           <a:xfrm>
             <a:off x="914400" y="2084832"/>
             <a:ext cx="4937760" cy="1225296"/>
@@ -2388,8 +2388,8 @@
           </a:prstGeom>
           <a:noFill/>
           <a:ln/>
-        </p:spPr>
-        <p:txBody>
+        </ns0:spPr>
+        <ns0:txBody>
           <a:bodyPr wrap="square" lIns="508" tIns="508" rIns="508" bIns="508" rtlCol="0" anchor="t">
             <a:normAutofit/>
           </a:bodyPr>
@@ -2411,15 +2411,15 @@
             </a:r>
             <a:endParaRPr lang="en-US" sz="1900" dirty="0"/>
           </a:p>
-        </p:txBody>
-      </p:sp>
-      <p:sp>
-        <p:nvSpPr>
-          <p:cNvPr id="9" name="Shape 7"/>
-          <p:cNvSpPr/>
-          <p:nvPr/>
-        </p:nvSpPr>
-        <p:spPr>
+        </ns0:txBody>
+      </ns0:sp>
+      <ns0:sp>
+        <ns0:nvSpPr>
+          <ns0:cNvPr id="9" name="Shape 7"/>
+          <ns0:cNvSpPr/>
+          <ns0:nvPr/>
+        </ns0:nvSpPr>
+        <ns0:spPr>
           <a:xfrm>
             <a:off x="6199632" y="1600200"/>
             <a:ext cx="5257800" cy="1828800"/>
@@ -2445,15 +2445,15 @@
               </a:srgbClr>
             </a:outerShdw>
           </a:effectLst>
-        </p:spPr>
-      </p:sp>
-      <p:sp>
-        <p:nvSpPr>
-          <p:cNvPr id="10" name="Shape 8"/>
-          <p:cNvSpPr/>
-          <p:nvPr/>
-        </p:nvSpPr>
-        <p:spPr>
+        </ns0:spPr>
+      </ns0:sp>
+      <ns0:sp>
+        <ns0:nvSpPr>
+          <ns0:cNvPr id="10" name="Shape 8"/>
+          <ns0:cNvSpPr/>
+          <ns0:nvPr/>
+        </ns0:nvSpPr>
+        <ns0:spPr>
           <a:xfrm>
             <a:off x="6199632" y="1600200"/>
             <a:ext cx="73152" cy="1828800"/>
@@ -2470,15 +2470,15 @@
             </a:solidFill>
             <a:prstDash val="solid"/>
           </a:ln>
-        </p:spPr>
-      </p:sp>
-      <p:sp>
-        <p:nvSpPr>
-          <p:cNvPr id="11" name="Text 9"/>
-          <p:cNvSpPr/>
-          <p:nvPr/>
-        </p:nvSpPr>
-        <p:spPr>
+        </ns0:spPr>
+      </ns0:sp>
+      <ns0:sp>
+        <ns0:nvSpPr>
+          <ns0:cNvPr id="11" name="Text 9"/>
+          <ns0:cNvSpPr/>
+          <ns0:nvPr/>
+        </ns0:nvSpPr>
+        <ns0:spPr>
           <a:xfrm>
             <a:off x="6382512" y="1737360"/>
             <a:ext cx="4937760" cy="256032"/>
@@ -2488,8 +2488,8 @@
           </a:prstGeom>
           <a:noFill/>
           <a:ln/>
-        </p:spPr>
-        <p:txBody>
+        </ns0:spPr>
+        <ns0:txBody>
           <a:bodyPr wrap="square" lIns="508" tIns="508" rIns="508" bIns="508" rtlCol="0" anchor="ctr">
             <a:normAutofit/>
           </a:bodyPr>
@@ -2511,15 +2511,15 @@
             </a:r>
             <a:endParaRPr lang="en-US" sz="1150" dirty="0"/>
           </a:p>
-        </p:txBody>
-      </p:sp>
-      <p:sp>
-        <p:nvSpPr>
-          <p:cNvPr id="12" name="Text 10"/>
-          <p:cNvSpPr/>
-          <p:nvPr/>
-        </p:nvSpPr>
-        <p:spPr>
+        </ns0:txBody>
+      </ns0:sp>
+      <ns0:sp>
+        <ns0:nvSpPr>
+          <ns0:cNvPr id="12" name="Text 10"/>
+          <ns0:cNvSpPr/>
+          <ns0:nvPr/>
+        </ns0:nvSpPr>
+        <ns0:spPr>
           <a:xfrm>
             <a:off x="6382512" y="2084832"/>
             <a:ext cx="4937760" cy="1225296"/>
@@ -2529,8 +2529,8 @@
           </a:prstGeom>
           <a:noFill/>
           <a:ln/>
-        </p:spPr>
-        <p:txBody>
+        </ns0:spPr>
+        <ns0:txBody>
           <a:bodyPr wrap="square" lIns="508" tIns="508" rIns="508" bIns="508" rtlCol="0" anchor="t">
             <a:normAutofit/>
           </a:bodyPr>
@@ -2548,19 +2548,19 @@
                 <a:ea typeface="Arial" pitchFamily="34" charset="-122"/>
                 <a:cs typeface="Arial" pitchFamily="34" charset="-120"/>
               </a:rPr>
-              <a:t>Karten, Akzentleiste und Weißraum bleiben konsistent.</a:t>
+              <a:t/>
             </a:r>
             <a:endParaRPr lang="en-US" sz="1800" dirty="0"/>
           </a:p>
-        </p:txBody>
-      </p:sp>
-      <p:sp>
-        <p:nvSpPr>
-          <p:cNvPr id="13" name="Shape 11"/>
-          <p:cNvSpPr/>
-          <p:nvPr/>
-        </p:nvSpPr>
-        <p:spPr>
+        </ns0:txBody>
+      </ns0:sp>
+      <ns0:sp>
+        <ns0:nvSpPr>
+          <ns0:cNvPr id="13" name="Shape 11"/>
+          <ns0:cNvSpPr/>
+          <ns0:nvPr/>
+        </ns0:nvSpPr>
+        <ns0:spPr>
           <a:xfrm>
             <a:off x="8138160" y="4983480"/>
             <a:ext cx="3291840" cy="749808"/>
@@ -2579,15 +2579,15 @@
             </a:solidFill>
             <a:prstDash val="solid"/>
           </a:ln>
-        </p:spPr>
-      </p:sp>
-      <p:sp>
-        <p:nvSpPr>
-          <p:cNvPr id="14" name="Text 12"/>
-          <p:cNvSpPr/>
-          <p:nvPr/>
-        </p:nvSpPr>
-        <p:spPr>
+        </ns0:spPr>
+      </ns0:sp>
+      <ns0:sp>
+        <ns0:nvSpPr>
+          <ns0:cNvPr id="14" name="Text 12"/>
+          <ns0:cNvSpPr/>
+          <ns0:nvPr/>
+        </ns0:nvSpPr>
+        <ns0:spPr>
           <a:xfrm>
             <a:off x="8321040" y="5120640"/>
             <a:ext cx="685800" cy="164592"/>
@@ -2597,8 +2597,8 @@
           </a:prstGeom>
           <a:noFill/>
           <a:ln/>
-        </p:spPr>
-        <p:txBody>
+        </ns0:spPr>
+        <ns0:txBody>
           <a:bodyPr wrap="square" lIns="508" tIns="508" rIns="508" bIns="508" rtlCol="0" anchor="ctr">
             <a:normAutofit/>
           </a:bodyPr>
@@ -2620,15 +2620,15 @@
             </a:r>
             <a:endParaRPr lang="en-US" sz="950" dirty="0"/>
           </a:p>
-        </p:txBody>
-      </p:sp>
-      <p:sp>
-        <p:nvSpPr>
-          <p:cNvPr id="15" name="Text 13"/>
-          <p:cNvSpPr/>
-          <p:nvPr/>
-        </p:nvSpPr>
-        <p:spPr>
+        </ns0:txBody>
+      </ns0:sp>
+      <ns0:sp>
+        <ns0:nvSpPr>
+          <ns0:cNvPr id="15" name="Text 13"/>
+          <ns0:cNvSpPr/>
+          <ns0:nvPr/>
+        </ns0:nvSpPr>
+        <ns0:spPr>
           <a:xfrm>
             <a:off x="8321040" y="5330952"/>
             <a:ext cx="2880360" cy="256032"/>
@@ -2638,8 +2638,8 @@
           </a:prstGeom>
           <a:noFill/>
           <a:ln/>
-        </p:spPr>
-        <p:txBody>
+        </ns0:spPr>
+        <ns0:txBody>
           <a:bodyPr wrap="square" lIns="508" tIns="508" rIns="508" bIns="508" rtlCol="0" anchor="ctr">
             <a:normAutofit/>
           </a:bodyPr>
@@ -2661,19 +2661,19 @@
             </a:r>
             <a:endParaRPr lang="en-US" sz="1450" dirty="0"/>
           </a:p>
-        </p:txBody>
-      </p:sp>
-      <p:sp>
-        <p:nvSpPr>
-          <p:cNvPr id="25" name="Slide Number Placeholder 0"/>
-          <p:cNvSpPr>
+        </ns0:txBody>
+      </ns0:sp>
+      <ns0:sp>
+        <ns0:nvSpPr>
+          <ns0:cNvPr id="25" name="Slide Number Placeholder 0"/>
+          <ns0:cNvSpPr>
             <a:spLocks noGrp="1"/>
-          </p:cNvSpPr>
-          <p:nvPr>
-            <p:ph type="sldNum" sz="quarter" idx="4294967295"/>
-          </p:nvPr>
-        </p:nvSpPr>
-        <p:spPr>
+          </ns0:cNvSpPr>
+          <ns0:nvPr>
+            <ns0:ph type="sldNum" sz="quarter" idx="4294967295"/>
+          </ns0:nvPr>
+        </ns0:nvSpPr>
+        <ns0:spPr>
           <a:xfrm>
             <a:off x="11384280" y="6492240"/>
             <a:ext cx="320040" cy="164592"/>
@@ -2683,11 +2683,11 @@
           </a:prstGeom>
           <a:extLst>
             <a:ext uri="{C572A759-6A51-4108-AA02-DFA0A04FC94B}">
-              <ma14:wrappingTextBoxFlag xmlns:ma14="http://schemas.microsoft.com/office/mac/drawingml/2011/main" val="0"/>
+              <ns2:wrappingTextBoxFlag val="0"/>
             </a:ext>
           </a:extLst>
-        </p:spPr>
-        <p:txBody>
+        </ns0:spPr>
+        <ns0:txBody>
           <a:bodyPr/>
           <a:lstStyle>
             <a:lvl1pPr>
@@ -2709,14 +2709,14 @@
             </a:fld>
             <a:endParaRPr lang="en-US"/>
           </a:p>
-        </p:txBody>
-      </p:sp>
-    </p:spTree>
-  </p:cSld>
-  <p:clrMapOvr>
+        </ns0:txBody>
+      </ns0:sp>
+    </ns0:spTree>
+  </ns0:cSld>
+  <ns0:clrMapOvr>
     <a:masterClrMapping/>
-  </p:clrMapOvr>
-</p:sld>
+  </ns0:clrMapOvr>
+</ns0:sld>
 </file>
 
 <file path=ppt/slides/slide3.xml><?xml version="1.0" encoding="utf-8"?>
@@ -3677,29 +3677,29 @@
 </file>
 
 <file path=ppt/slides/slide4.xml><?xml version="1.0" encoding="utf-8"?>
-<p:sld xmlns:a="http://schemas.openxmlformats.org/drawingml/2006/main" xmlns:r="http://schemas.openxmlformats.org/officeDocument/2006/relationships" xmlns:p="http://schemas.openxmlformats.org/presentationml/2006/main">
-  <p:cSld name="Slide 4">
-    <p:spTree>
-      <p:nvGrpSpPr>
-        <p:cNvPr id="1" name=""/>
-        <p:cNvGrpSpPr/>
-        <p:nvPr/>
-      </p:nvGrpSpPr>
-      <p:grpSpPr>
+<ns0:sld xmlns:a="http://schemas.openxmlformats.org/drawingml/2006/main" xmlns:ns0="http://schemas.openxmlformats.org/presentationml/2006/main" xmlns:ns2="http://schemas.microsoft.com/office/mac/drawingml/2011/main">
+  <ns0:cSld name="Slide 4">
+    <ns0:spTree>
+      <ns0:nvGrpSpPr>
+        <ns0:cNvPr id="1" name=""/>
+        <ns0:cNvGrpSpPr/>
+        <ns0:nvPr/>
+      </ns0:nvGrpSpPr>
+      <ns0:grpSpPr>
         <a:xfrm>
           <a:off x="0" y="0"/>
           <a:ext cx="0" cy="0"/>
           <a:chOff x="0" y="0"/>
           <a:chExt cx="0" cy="0"/>
         </a:xfrm>
-      </p:grpSpPr>
-      <p:sp>
-        <p:nvSpPr>
-          <p:cNvPr id="2" name="Text 0"/>
-          <p:cNvSpPr/>
-          <p:nvPr/>
-        </p:nvSpPr>
-        <p:spPr>
+      </ns0:grpSpPr>
+      <ns0:sp>
+        <ns0:nvSpPr>
+          <ns0:cNvPr id="2" name="Text 0"/>
+          <ns0:cNvSpPr/>
+          <ns0:nvPr/>
+        </ns0:nvSpPr>
+        <ns0:spPr>
           <a:xfrm>
             <a:off x="685800" y="1234440"/>
             <a:ext cx="6858000" cy="475488"/>
@@ -3709,8 +3709,8 @@
           </a:prstGeom>
           <a:noFill/>
           <a:ln/>
-        </p:spPr>
-        <p:txBody>
+        </ns0:spPr>
+        <ns0:txBody>
           <a:bodyPr wrap="square" lIns="508" tIns="508" rIns="508" bIns="508" rtlCol="0" anchor="ctr">
             <a:normAutofit/>
           </a:bodyPr>
@@ -3732,15 +3732,15 @@
             </a:r>
             <a:endParaRPr lang="en-US" sz="2800" dirty="0"/>
           </a:p>
-        </p:txBody>
-      </p:sp>
-      <p:sp>
-        <p:nvSpPr>
-          <p:cNvPr id="3" name="Text 1"/>
-          <p:cNvSpPr/>
-          <p:nvPr/>
-        </p:nvSpPr>
-        <p:spPr>
+        </ns0:txBody>
+      </ns0:sp>
+      <ns0:sp>
+        <ns0:nvSpPr>
+          <ns0:cNvPr id="3" name="Text 1"/>
+          <ns0:cNvSpPr/>
+          <ns0:nvPr/>
+        </ns0:nvSpPr>
+        <ns0:spPr>
           <a:xfrm>
             <a:off x="713232" y="1737360"/>
             <a:ext cx="7315200" cy="256032"/>
@@ -3750,8 +3750,8 @@
           </a:prstGeom>
           <a:noFill/>
           <a:ln/>
-        </p:spPr>
-        <p:txBody>
+        </ns0:spPr>
+        <ns0:txBody>
           <a:bodyPr wrap="square" lIns="508" tIns="508" rIns="508" bIns="508" rtlCol="0" anchor="ctr">
             <a:normAutofit/>
           </a:bodyPr>
@@ -3769,19 +3769,19 @@
                 <a:ea typeface="Arial" pitchFamily="34" charset="-122"/>
                 <a:cs typeface="Arial" pitchFamily="34" charset="-120"/>
               </a:rPr>
-              <a:t>Beispiel · Exit-Layout · Operatoren geeignet</a:t>
+              <a:t>Beispiel · Exit-Layout ·</a:t>
             </a:r>
             <a:endParaRPr lang="en-US" sz="1300" dirty="0"/>
           </a:p>
-        </p:txBody>
-      </p:sp>
-      <p:sp>
-        <p:nvSpPr>
-          <p:cNvPr id="4" name="Shape 2"/>
-          <p:cNvSpPr/>
-          <p:nvPr/>
-        </p:nvSpPr>
-        <p:spPr>
+        </ns0:txBody>
+      </ns0:sp>
+      <ns0:sp>
+        <ns0:nvSpPr>
+          <ns0:cNvPr id="4" name="Shape 2"/>
+          <ns0:cNvSpPr/>
+          <ns0:nvPr/>
+        </ns0:nvSpPr>
+        <ns0:spPr>
           <a:xfrm>
             <a:off x="731520" y="2331720"/>
             <a:ext cx="5230368" cy="841248"/>
@@ -3800,15 +3800,15 @@
             </a:solidFill>
             <a:prstDash val="solid"/>
           </a:ln>
-        </p:spPr>
-      </p:sp>
-      <p:sp>
-        <p:nvSpPr>
-          <p:cNvPr id="5" name="Text 3"/>
-          <p:cNvSpPr/>
-          <p:nvPr/>
-        </p:nvSpPr>
-        <p:spPr>
+        </ns0:spPr>
+      </ns0:sp>
+      <ns0:sp>
+        <ns0:nvSpPr>
+          <ns0:cNvPr id="5" name="Text 3"/>
+          <ns0:cNvSpPr/>
+          <ns0:nvPr/>
+        </ns0:nvSpPr>
+        <ns0:spPr>
           <a:xfrm>
             <a:off x="896112" y="2478024"/>
             <a:ext cx="347472" cy="438912"/>
@@ -3818,8 +3818,8 @@
           </a:prstGeom>
           <a:noFill/>
           <a:ln/>
-        </p:spPr>
-        <p:txBody>
+        </ns0:spPr>
+        <ns0:txBody>
           <a:bodyPr wrap="square" lIns="508" tIns="508" rIns="508" bIns="508" rtlCol="0" anchor="ctr">
             <a:normAutofit/>
           </a:bodyPr>
@@ -3841,15 +3841,15 @@
             </a:r>
             <a:endParaRPr lang="en-US" sz="1300" dirty="0"/>
           </a:p>
-        </p:txBody>
-      </p:sp>
-      <p:sp>
-        <p:nvSpPr>
-          <p:cNvPr id="6" name="Text 4"/>
-          <p:cNvSpPr/>
-          <p:nvPr/>
-        </p:nvSpPr>
-        <p:spPr>
+        </ns0:txBody>
+      </ns0:sp>
+      <ns0:sp>
+        <ns0:nvSpPr>
+          <ns0:cNvPr id="6" name="Text 4"/>
+          <ns0:cNvSpPr/>
+          <ns0:nvPr/>
+        </ns0:nvSpPr>
+        <ns0:spPr>
           <a:xfrm>
             <a:off x="1353312" y="2450592"/>
             <a:ext cx="4425696" cy="566928"/>
@@ -3859,8 +3859,8 @@
           </a:prstGeom>
           <a:noFill/>
           <a:ln/>
-        </p:spPr>
-        <p:txBody>
+        </ns0:spPr>
+        <ns0:txBody>
           <a:bodyPr wrap="square" lIns="508" tIns="508" rIns="508" bIns="508" rtlCol="0" anchor="ctr">
             <a:normAutofit/>
           </a:bodyPr>
@@ -3882,15 +3882,15 @@
             </a:r>
             <a:endParaRPr lang="en-US" sz="1430" dirty="0"/>
           </a:p>
-        </p:txBody>
-      </p:sp>
-      <p:sp>
-        <p:nvSpPr>
-          <p:cNvPr id="7" name="Shape 5"/>
-          <p:cNvSpPr/>
-          <p:nvPr/>
-        </p:nvSpPr>
-        <p:spPr>
+        </ns0:txBody>
+      </ns0:sp>
+      <ns0:sp>
+        <ns0:nvSpPr>
+          <ns0:cNvPr id="7" name="Shape 5"/>
+          <ns0:cNvSpPr/>
+          <ns0:nvPr/>
+        </ns0:nvSpPr>
+        <ns0:spPr>
           <a:xfrm>
             <a:off x="6236208" y="2331720"/>
             <a:ext cx="5230368" cy="841248"/>
@@ -3909,15 +3909,15 @@
             </a:solidFill>
             <a:prstDash val="solid"/>
           </a:ln>
-        </p:spPr>
-      </p:sp>
-      <p:sp>
-        <p:nvSpPr>
-          <p:cNvPr id="8" name="Text 6"/>
-          <p:cNvSpPr/>
-          <p:nvPr/>
-        </p:nvSpPr>
-        <p:spPr>
+        </ns0:spPr>
+      </ns0:sp>
+      <ns0:sp>
+        <ns0:nvSpPr>
+          <ns0:cNvPr id="8" name="Text 6"/>
+          <ns0:cNvSpPr/>
+          <ns0:nvPr/>
+        </ns0:nvSpPr>
+        <ns0:spPr>
           <a:xfrm>
             <a:off x="6400800" y="2478024"/>
             <a:ext cx="347472" cy="438912"/>
@@ -3927,8 +3927,8 @@
           </a:prstGeom>
           <a:noFill/>
           <a:ln/>
-        </p:spPr>
-        <p:txBody>
+        </ns0:spPr>
+        <ns0:txBody>
           <a:bodyPr wrap="square" lIns="508" tIns="508" rIns="508" bIns="508" rtlCol="0" anchor="ctr">
             <a:normAutofit/>
           </a:bodyPr>
@@ -3950,15 +3950,15 @@
             </a:r>
             <a:endParaRPr lang="en-US" sz="1300" dirty="0"/>
           </a:p>
-        </p:txBody>
-      </p:sp>
-      <p:sp>
-        <p:nvSpPr>
-          <p:cNvPr id="9" name="Text 7"/>
-          <p:cNvSpPr/>
-          <p:nvPr/>
-        </p:nvSpPr>
-        <p:spPr>
+        </ns0:txBody>
+      </ns0:sp>
+      <ns0:sp>
+        <ns0:nvSpPr>
+          <ns0:cNvPr id="9" name="Text 7"/>
+          <ns0:cNvSpPr/>
+          <ns0:nvPr/>
+        </ns0:nvSpPr>
+        <ns0:spPr>
           <a:xfrm>
             <a:off x="6858000" y="2450592"/>
             <a:ext cx="4425696" cy="566928"/>
@@ -3968,8 +3968,8 @@
           </a:prstGeom>
           <a:noFill/>
           <a:ln/>
-        </p:spPr>
-        <p:txBody>
+        </ns0:spPr>
+        <ns0:txBody>
           <a:bodyPr wrap="square" lIns="508" tIns="508" rIns="508" bIns="508" rtlCol="0" anchor="ctr">
             <a:normAutofit/>
           </a:bodyPr>
@@ -3991,15 +3991,15 @@
             </a:r>
             <a:endParaRPr lang="en-US" sz="1430" dirty="0"/>
           </a:p>
-        </p:txBody>
-      </p:sp>
-      <p:sp>
-        <p:nvSpPr>
-          <p:cNvPr id="10" name="Shape 8"/>
-          <p:cNvSpPr/>
-          <p:nvPr/>
-        </p:nvSpPr>
-        <p:spPr>
+        </ns0:txBody>
+      </ns0:sp>
+      <ns0:sp>
+        <ns0:nvSpPr>
+          <ns0:cNvPr id="10" name="Shape 8"/>
+          <ns0:cNvSpPr/>
+          <ns0:nvPr/>
+        </ns0:nvSpPr>
+        <ns0:spPr>
           <a:xfrm>
             <a:off x="731520" y="3429000"/>
             <a:ext cx="5230368" cy="841248"/>
@@ -4018,15 +4018,15 @@
             </a:solidFill>
             <a:prstDash val="solid"/>
           </a:ln>
-        </p:spPr>
-      </p:sp>
-      <p:sp>
-        <p:nvSpPr>
-          <p:cNvPr id="11" name="Text 9"/>
-          <p:cNvSpPr/>
-          <p:nvPr/>
-        </p:nvSpPr>
-        <p:spPr>
+        </ns0:spPr>
+      </ns0:sp>
+      <ns0:sp>
+        <ns0:nvSpPr>
+          <ns0:cNvPr id="11" name="Text 9"/>
+          <ns0:cNvSpPr/>
+          <ns0:nvPr/>
+        </ns0:nvSpPr>
+        <ns0:spPr>
           <a:xfrm>
             <a:off x="896112" y="3575304"/>
             <a:ext cx="347472" cy="438912"/>
@@ -4036,8 +4036,8 @@
           </a:prstGeom>
           <a:noFill/>
           <a:ln/>
-        </p:spPr>
-        <p:txBody>
+        </ns0:spPr>
+        <ns0:txBody>
           <a:bodyPr wrap="square" lIns="508" tIns="508" rIns="508" bIns="508" rtlCol="0" anchor="ctr">
             <a:normAutofit/>
           </a:bodyPr>
@@ -4059,15 +4059,15 @@
             </a:r>
             <a:endParaRPr lang="en-US" sz="1300" dirty="0"/>
           </a:p>
-        </p:txBody>
-      </p:sp>
-      <p:sp>
-        <p:nvSpPr>
-          <p:cNvPr id="12" name="Text 10"/>
-          <p:cNvSpPr/>
-          <p:nvPr/>
-        </p:nvSpPr>
-        <p:spPr>
+        </ns0:txBody>
+      </ns0:sp>
+      <ns0:sp>
+        <ns0:nvSpPr>
+          <ns0:cNvPr id="12" name="Text 10"/>
+          <ns0:cNvSpPr/>
+          <ns0:nvPr/>
+        </ns0:nvSpPr>
+        <ns0:spPr>
           <a:xfrm>
             <a:off x="1353312" y="3547872"/>
             <a:ext cx="4425696" cy="566928"/>
@@ -4077,8 +4077,8 @@
           </a:prstGeom>
           <a:noFill/>
           <a:ln/>
-        </p:spPr>
-        <p:txBody>
+        </ns0:spPr>
+        <ns0:txBody>
           <a:bodyPr wrap="square" lIns="508" tIns="508" rIns="508" bIns="508" rtlCol="0" anchor="ctr">
             <a:normAutofit/>
           </a:bodyPr>
@@ -4100,15 +4100,15 @@
             </a:r>
             <a:endParaRPr lang="en-US" sz="1430" dirty="0"/>
           </a:p>
-        </p:txBody>
-      </p:sp>
-      <p:sp>
-        <p:nvSpPr>
-          <p:cNvPr id="13" name="Shape 11"/>
-          <p:cNvSpPr/>
-          <p:nvPr/>
-        </p:nvSpPr>
-        <p:spPr>
+        </ns0:txBody>
+      </ns0:sp>
+      <ns0:sp>
+        <ns0:nvSpPr>
+          <ns0:cNvPr id="13" name="Shape 11"/>
+          <ns0:cNvSpPr/>
+          <ns0:nvPr/>
+        </ns0:nvSpPr>
+        <ns0:spPr>
           <a:xfrm>
             <a:off x="6236208" y="3429000"/>
             <a:ext cx="5230368" cy="841248"/>
@@ -4127,15 +4127,15 @@
             </a:solidFill>
             <a:prstDash val="solid"/>
           </a:ln>
-        </p:spPr>
-      </p:sp>
-      <p:sp>
-        <p:nvSpPr>
-          <p:cNvPr id="14" name="Text 12"/>
-          <p:cNvSpPr/>
-          <p:nvPr/>
-        </p:nvSpPr>
-        <p:spPr>
+        </ns0:spPr>
+      </ns0:sp>
+      <ns0:sp>
+        <ns0:nvSpPr>
+          <ns0:cNvPr id="14" name="Text 12"/>
+          <ns0:cNvSpPr/>
+          <ns0:nvPr/>
+        </ns0:nvSpPr>
+        <ns0:spPr>
           <a:xfrm>
             <a:off x="6400800" y="3575304"/>
             <a:ext cx="347472" cy="438912"/>
@@ -4145,8 +4145,8 @@
           </a:prstGeom>
           <a:noFill/>
           <a:ln/>
-        </p:spPr>
-        <p:txBody>
+        </ns0:spPr>
+        <ns0:txBody>
           <a:bodyPr wrap="square" lIns="508" tIns="508" rIns="508" bIns="508" rtlCol="0" anchor="ctr">
             <a:normAutofit/>
           </a:bodyPr>
@@ -4168,15 +4168,15 @@
             </a:r>
             <a:endParaRPr lang="en-US" sz="1300" dirty="0"/>
           </a:p>
-        </p:txBody>
-      </p:sp>
-      <p:sp>
-        <p:nvSpPr>
-          <p:cNvPr id="15" name="Text 13"/>
-          <p:cNvSpPr/>
-          <p:nvPr/>
-        </p:nvSpPr>
-        <p:spPr>
+        </ns0:txBody>
+      </ns0:sp>
+      <ns0:sp>
+        <ns0:nvSpPr>
+          <ns0:cNvPr id="15" name="Text 13"/>
+          <ns0:cNvSpPr/>
+          <ns0:nvPr/>
+        </ns0:nvSpPr>
+        <ns0:spPr>
           <a:xfrm>
             <a:off x="6858000" y="3547872"/>
             <a:ext cx="4425696" cy="566928"/>
@@ -4186,8 +4186,8 @@
           </a:prstGeom>
           <a:noFill/>
           <a:ln/>
-        </p:spPr>
-        <p:txBody>
+        </ns0:spPr>
+        <ns0:txBody>
           <a:bodyPr wrap="square" lIns="508" tIns="508" rIns="508" bIns="508" rtlCol="0" anchor="ctr">
             <a:normAutofit/>
           </a:bodyPr>
@@ -4209,15 +4209,15 @@
             </a:r>
             <a:endParaRPr lang="en-US" sz="1430" dirty="0"/>
           </a:p>
-        </p:txBody>
-      </p:sp>
-      <p:sp>
-        <p:nvSpPr>
-          <p:cNvPr id="16" name="Shape 14"/>
-          <p:cNvSpPr/>
-          <p:nvPr/>
-        </p:nvSpPr>
-        <p:spPr>
+        </ns0:txBody>
+      </ns0:sp>
+      <ns0:sp>
+        <ns0:nvSpPr>
+          <ns0:cNvPr id="16" name="Shape 14"/>
+          <ns0:cNvSpPr/>
+          <ns0:nvPr/>
+        </ns0:nvSpPr>
+        <ns0:spPr>
           <a:xfrm>
             <a:off x="731520" y="4526280"/>
             <a:ext cx="10762488" cy="841248"/>
@@ -4236,15 +4236,15 @@
             </a:solidFill>
             <a:prstDash val="solid"/>
           </a:ln>
-        </p:spPr>
-      </p:sp>
-      <p:sp>
-        <p:nvSpPr>
-          <p:cNvPr id="17" name="Text 15"/>
-          <p:cNvSpPr/>
-          <p:nvPr/>
-        </p:nvSpPr>
-        <p:spPr>
+        </ns0:spPr>
+      </ns0:sp>
+      <ns0:sp>
+        <ns0:nvSpPr>
+          <ns0:cNvPr id="17" name="Text 15"/>
+          <ns0:cNvSpPr/>
+          <ns0:nvPr/>
+        </ns0:nvSpPr>
+        <ns0:spPr>
           <a:xfrm>
             <a:off x="896112" y="4672584"/>
             <a:ext cx="347472" cy="438912"/>
@@ -4254,8 +4254,8 @@
           </a:prstGeom>
           <a:noFill/>
           <a:ln/>
-        </p:spPr>
-        <p:txBody>
+        </ns0:spPr>
+        <ns0:txBody>
           <a:bodyPr wrap="square" lIns="508" tIns="508" rIns="508" bIns="508" rtlCol="0" anchor="ctr">
             <a:normAutofit/>
           </a:bodyPr>
@@ -4277,15 +4277,15 @@
             </a:r>
             <a:endParaRPr lang="en-US" sz="1300" dirty="0"/>
           </a:p>
-        </p:txBody>
-      </p:sp>
-      <p:sp>
-        <p:nvSpPr>
-          <p:cNvPr id="18" name="Text 16"/>
-          <p:cNvSpPr/>
-          <p:nvPr/>
-        </p:nvSpPr>
-        <p:spPr>
+        </ns0:txBody>
+      </ns0:sp>
+      <ns0:sp>
+        <ns0:nvSpPr>
+          <ns0:cNvPr id="18" name="Text 16"/>
+          <ns0:cNvSpPr/>
+          <ns0:nvPr/>
+        </ns0:nvSpPr>
+        <ns0:spPr>
           <a:xfrm>
             <a:off x="1353312" y="4645152"/>
             <a:ext cx="9957816" cy="566928"/>
@@ -4295,8 +4295,8 @@
           </a:prstGeom>
           <a:noFill/>
           <a:ln/>
-        </p:spPr>
-        <p:txBody>
+        </ns0:spPr>
+        <ns0:txBody>
           <a:bodyPr wrap="square" lIns="508" tIns="508" rIns="508" bIns="508" rtlCol="0" anchor="ctr">
             <a:normAutofit/>
           </a:bodyPr>
@@ -4318,19 +4318,19 @@
             </a:r>
             <a:endParaRPr lang="en-US" sz="1430" dirty="0"/>
           </a:p>
-        </p:txBody>
-      </p:sp>
-      <p:sp>
-        <p:nvSpPr>
-          <p:cNvPr id="25" name="Slide Number Placeholder 0"/>
-          <p:cNvSpPr>
+        </ns0:txBody>
+      </ns0:sp>
+      <ns0:sp>
+        <ns0:nvSpPr>
+          <ns0:cNvPr id="25" name="Slide Number Placeholder 0"/>
+          <ns0:cNvSpPr>
             <a:spLocks noGrp="1"/>
-          </p:cNvSpPr>
-          <p:nvPr>
-            <p:ph type="sldNum" sz="quarter" idx="4294967295"/>
-          </p:nvPr>
-        </p:nvSpPr>
-        <p:spPr>
+          </ns0:cNvSpPr>
+          <ns0:nvPr>
+            <ns0:ph type="sldNum" sz="quarter" idx="4294967295"/>
+          </ns0:nvPr>
+        </ns0:nvSpPr>
+        <ns0:spPr>
           <a:xfrm>
             <a:off x="11658600" y="6446520"/>
             <a:ext cx="274320" cy="182880"/>
@@ -4340,11 +4340,11 @@
           </a:prstGeom>
           <a:extLst>
             <a:ext uri="{C572A759-6A51-4108-AA02-DFA0A04FC94B}">
-              <ma14:wrappingTextBoxFlag xmlns:ma14="http://schemas.microsoft.com/office/mac/drawingml/2011/main" val="0"/>
+              <ns2:wrappingTextBoxFlag val="0"/>
             </a:ext>
           </a:extLst>
-        </p:spPr>
-        <p:txBody>
+        </ns0:spPr>
+        <ns0:txBody>
           <a:bodyPr/>
           <a:lstStyle>
             <a:lvl1pPr>
@@ -4366,14 +4366,14 @@
             </a:fld>
             <a:endParaRPr lang="en-US"/>
           </a:p>
-        </p:txBody>
-      </p:sp>
-    </p:spTree>
-  </p:cSld>
-  <p:clrMapOvr>
+        </ns0:txBody>
+      </ns0:sp>
+    </ns0:spTree>
+  </ns0:cSld>
+  <ns0:clrMapOvr>
     <a:masterClrMapping/>
-  </p:clrMapOvr>
-</p:sld>
+  </ns0:clrMapOvr>
+</ns0:sld>
 </file>
 
 <file path=ppt/theme/theme1.xml><?xml version="1.0" encoding="utf-8"?>
